--- a/site/clases/parte-2-deep-learning/126-keras-preprocessing-layers/clase-126-keras-preprocessing-layers-presentacion.pptx
+++ b/site/clases/parte-2-deep-learning/126-keras-preprocessing-layers/clase-126-keras-preprocessing-layers-presentacion.pptx
@@ -3272,7 +3272,7 @@
                 </a:solidFill>
                 <a:latin typeface="Segoe UI"/>
               </a:rPr>
-              <a:t>Parte: 2 — Deep Learning · Fuente: Géron, cap. 13 § The Keras Preprocessing Layers.  Duración estimada: 65 min.</a:t>
+              <a:t>Parte: 2 — Deep Learning · Fuente: Géron, cap. 13 § The Keras Preprocessing Layers.  Duración estimada: 65 min. · Nivel: Avanzado</a:t>
             </a:r>
           </a:p>
         </p:txBody>
@@ -3581,7 +3581,7 @@
                 </a:solidFill>
                 <a:latin typeface="Segoe UI"/>
               </a:rPr>
-              <a:t>Parte: 2 — Deep Learning · Fuente: Géron, cap. 13 § The Keras Preprocessing Layers.  Duración estimada: 65 min.</a:t>
+              <a:t>Parte: 2 — Deep Learning · Fuente: Géron, cap. 13 § The Keras Preprocessing Layers.  Duración estimada: 65 min. · Nivel: Avanzado</a:t>
             </a:r>
           </a:p>
         </p:txBody>
@@ -4910,7 +4910,216 @@
                 </a:solidFill>
                 <a:latin typeface="Courier New"/>
               </a:rPr>
-              <a:t># Imports y configuración inicial</a:t>
+              <a:t>import numpy as np</a:t>
+            </a:r>
+          </a:p>
+          <a:p>
+            <a:pPr>
+              <a:defRPr sz="1200" b="0">
+                <a:solidFill>
+                  <a:srgbClr val="F8FAFC"/>
+                </a:solidFill>
+                <a:latin typeface="Courier New"/>
+              </a:defRPr>
+            </a:pPr>
+            <a:r>
+              <a:rPr sz="1200" b="0">
+                <a:solidFill>
+                  <a:srgbClr val="F8FAFC"/>
+                </a:solidFill>
+                <a:latin typeface="Courier New"/>
+              </a:rPr>
+              <a:t>import tensorflow as tf</a:t>
+            </a:r>
+          </a:p>
+          <a:p>
+            <a:pPr>
+              <a:defRPr sz="1200" b="0">
+                <a:solidFill>
+                  <a:srgbClr val="F8FAFC"/>
+                </a:solidFill>
+                <a:latin typeface="Courier New"/>
+              </a:defRPr>
+            </a:pPr>
+            <a:r>
+              <a:rPr sz="1200" b="0">
+                <a:solidFill>
+                  <a:srgbClr val="F8FAFC"/>
+                </a:solidFill>
+                <a:latin typeface="Courier New"/>
+              </a:rPr>
+              <a:t>from tensorflow import keras</a:t>
+            </a:r>
+          </a:p>
+          <a:p>
+            <a:pPr>
+              <a:defRPr sz="1200" b="0">
+                <a:solidFill>
+                  <a:srgbClr val="F8FAFC"/>
+                </a:solidFill>
+                <a:latin typeface="Courier New"/>
+              </a:defRPr>
+            </a:pPr>
+            <a:r>
+              <a:rPr sz="1200" b="0">
+                <a:solidFill>
+                  <a:srgbClr val="F8FAFC"/>
+                </a:solidFill>
+                <a:latin typeface="Courier New"/>
+              </a:rPr>
+              <a:t>from tensorflow.keras import layers</a:t>
+            </a:r>
+          </a:p>
+          <a:p>
+            <a:pPr>
+              <a:defRPr sz="1200" b="0">
+                <a:solidFill>
+                  <a:srgbClr val="F8FAFC"/>
+                </a:solidFill>
+                <a:latin typeface="Courier New"/>
+              </a:defRPr>
+            </a:pPr>
+            <a:r>
+              <a:rPr sz="1200" b="0">
+                <a:solidFill>
+                  <a:srgbClr val="F8FAFC"/>
+                </a:solidFill>
+                <a:latin typeface="Courier New"/>
+              </a:rPr>
+              <a:t>keras.utils.set_random_seed(42)</a:t>
+            </a:r>
+          </a:p>
+          <a:p>
+            <a:pPr>
+              <a:defRPr sz="1200" b="0">
+                <a:solidFill>
+                  <a:srgbClr val="F8FAFC"/>
+                </a:solidFill>
+                <a:latin typeface="Courier New"/>
+              </a:defRPr>
+            </a:pPr>
+            <a:r>
+              <a:rPr sz="1200" b="0">
+                <a:solidFill>
+                  <a:srgbClr val="F8FAFC"/>
+                </a:solidFill>
+                <a:latin typeface="Courier New"/>
+              </a:rPr>
+              <a:t> </a:t>
+            </a:r>
+          </a:p>
+          <a:p>
+            <a:pPr>
+              <a:defRPr sz="1200" b="0">
+                <a:solidFill>
+                  <a:srgbClr val="F8FAFC"/>
+                </a:solidFill>
+                <a:latin typeface="Courier New"/>
+              </a:defRPr>
+            </a:pPr>
+            <a:r>
+              <a:rPr sz="1200" b="0">
+                <a:solidFill>
+                  <a:srgbClr val="F8FAFC"/>
+                </a:solidFill>
+                <a:latin typeface="Courier New"/>
+              </a:rPr>
+              <a:t>X_train = tf.random.normal((500, 4), mean=5.0, stddev=2.0)</a:t>
+            </a:r>
+          </a:p>
+          <a:p>
+            <a:pPr>
+              <a:defRPr sz="1200" b="0">
+                <a:solidFill>
+                  <a:srgbClr val="F8FAFC"/>
+                </a:solidFill>
+                <a:latin typeface="Courier New"/>
+              </a:defRPr>
+            </a:pPr>
+            <a:r>
+              <a:rPr sz="1200" b="0">
+                <a:solidFill>
+                  <a:srgbClr val="F8FAFC"/>
+                </a:solidFill>
+                <a:latin typeface="Courier New"/>
+              </a:rPr>
+              <a:t>norm = layers.Normalization()</a:t>
+            </a:r>
+          </a:p>
+          <a:p>
+            <a:pPr>
+              <a:defRPr sz="1200" b="0">
+                <a:solidFill>
+                  <a:srgbClr val="F8FAFC"/>
+                </a:solidFill>
+                <a:latin typeface="Courier New"/>
+              </a:defRPr>
+            </a:pPr>
+            <a:r>
+              <a:rPr sz="1200" b="0">
+                <a:solidFill>
+                  <a:srgbClr val="F8FAFC"/>
+                </a:solidFill>
+                <a:latin typeface="Courier New"/>
+              </a:rPr>
+              <a:t>norm.adapt(X_train)                       # aprende mean/std por feature</a:t>
+            </a:r>
+          </a:p>
+          <a:p>
+            <a:pPr>
+              <a:defRPr sz="1200" b="0">
+                <a:solidFill>
+                  <a:srgbClr val="F8FAFC"/>
+                </a:solidFill>
+                <a:latin typeface="Courier New"/>
+              </a:defRPr>
+            </a:pPr>
+            <a:r>
+              <a:rPr sz="1200" b="0">
+                <a:solidFill>
+                  <a:srgbClr val="F8FAFC"/>
+                </a:solidFill>
+                <a:latin typeface="Courier New"/>
+              </a:rPr>
+              <a:t>X_norm = norm(X_train)</a:t>
+            </a:r>
+          </a:p>
+          <a:p>
+            <a:pPr>
+              <a:defRPr sz="1200" b="0">
+                <a:solidFill>
+                  <a:srgbClr val="F8FAFC"/>
+                </a:solidFill>
+                <a:latin typeface="Courier New"/>
+              </a:defRPr>
+            </a:pPr>
+            <a:r>
+              <a:rPr sz="1200" b="0">
+                <a:solidFill>
+                  <a:srgbClr val="F8FAFC"/>
+                </a:solidFill>
+                <a:latin typeface="Courier New"/>
+              </a:rPr>
+              <a:t>print("mean tras normalizar ~ 0:", np.round(tf.reduce_mean(X_norm, axis=0).numpy(), 3))</a:t>
+            </a:r>
+          </a:p>
+          <a:p>
+            <a:pPr>
+              <a:defRPr sz="1200" b="0">
+                <a:solidFill>
+                  <a:srgbClr val="F8FAFC"/>
+                </a:solidFill>
+                <a:latin typeface="Courier New"/>
+              </a:defRPr>
+            </a:pPr>
+            <a:r>
+              <a:rPr sz="1200" b="0">
+                <a:solidFill>
+                  <a:srgbClr val="F8FAFC"/>
+                </a:solidFill>
+                <a:latin typeface="Courier New"/>
+              </a:rPr>
+              <a:t>print("std  tras normalizar ~ 1:", np.round(tf.math.reduce_std(X_norm, axis=0).numpy(), 3))</a:t>
             </a:r>
           </a:p>
         </p:txBody>
